--- a/iswc_2026_paper/figures/sparql_query_fig.pptx
+++ b/iswc_2026_paper/figures/sparql_query_fig.pptx
@@ -210,7 +210,7 @@
           <a:p>
             <a:fld id="{62E1CCB6-B4D1-8B49-ADBB-CEB7A7ED5C6E}" type="datetimeFigureOut">
               <a:rPr lang="en-US" smtClean="0"/>
-              <a:t>5/4/26</a:t>
+              <a:t>5/7/26</a:t>
             </a:fld>
             <a:endParaRPr lang="en-US"/>
           </a:p>
@@ -708,7 +708,7 @@
           <a:p>
             <a:fld id="{397AAE18-5BE7-4440-BD7D-BAF2972CAD70}" type="datetimeFigureOut">
               <a:rPr lang="en-US" smtClean="0"/>
-              <a:t>5/4/26</a:t>
+              <a:t>5/7/26</a:t>
             </a:fld>
             <a:endParaRPr lang="en-US"/>
           </a:p>
@@ -906,7 +906,7 @@
           <a:p>
             <a:fld id="{397AAE18-5BE7-4440-BD7D-BAF2972CAD70}" type="datetimeFigureOut">
               <a:rPr lang="en-US" smtClean="0"/>
-              <a:t>5/4/26</a:t>
+              <a:t>5/7/26</a:t>
             </a:fld>
             <a:endParaRPr lang="en-US"/>
           </a:p>
@@ -1114,7 +1114,7 @@
           <a:p>
             <a:fld id="{397AAE18-5BE7-4440-BD7D-BAF2972CAD70}" type="datetimeFigureOut">
               <a:rPr lang="en-US" smtClean="0"/>
-              <a:t>5/4/26</a:t>
+              <a:t>5/7/26</a:t>
             </a:fld>
             <a:endParaRPr lang="en-US"/>
           </a:p>
@@ -1312,7 +1312,7 @@
           <a:p>
             <a:fld id="{397AAE18-5BE7-4440-BD7D-BAF2972CAD70}" type="datetimeFigureOut">
               <a:rPr lang="en-US" smtClean="0"/>
-              <a:t>5/4/26</a:t>
+              <a:t>5/7/26</a:t>
             </a:fld>
             <a:endParaRPr lang="en-US"/>
           </a:p>
@@ -1587,7 +1587,7 @@
           <a:p>
             <a:fld id="{397AAE18-5BE7-4440-BD7D-BAF2972CAD70}" type="datetimeFigureOut">
               <a:rPr lang="en-US" smtClean="0"/>
-              <a:t>5/4/26</a:t>
+              <a:t>5/7/26</a:t>
             </a:fld>
             <a:endParaRPr lang="en-US"/>
           </a:p>
@@ -1852,7 +1852,7 @@
           <a:p>
             <a:fld id="{397AAE18-5BE7-4440-BD7D-BAF2972CAD70}" type="datetimeFigureOut">
               <a:rPr lang="en-US" smtClean="0"/>
-              <a:t>5/4/26</a:t>
+              <a:t>5/7/26</a:t>
             </a:fld>
             <a:endParaRPr lang="en-US"/>
           </a:p>
@@ -2264,7 +2264,7 @@
           <a:p>
             <a:fld id="{397AAE18-5BE7-4440-BD7D-BAF2972CAD70}" type="datetimeFigureOut">
               <a:rPr lang="en-US" smtClean="0"/>
-              <a:t>5/4/26</a:t>
+              <a:t>5/7/26</a:t>
             </a:fld>
             <a:endParaRPr lang="en-US"/>
           </a:p>
@@ -2405,7 +2405,7 @@
           <a:p>
             <a:fld id="{397AAE18-5BE7-4440-BD7D-BAF2972CAD70}" type="datetimeFigureOut">
               <a:rPr lang="en-US" smtClean="0"/>
-              <a:t>5/4/26</a:t>
+              <a:t>5/7/26</a:t>
             </a:fld>
             <a:endParaRPr lang="en-US"/>
           </a:p>
@@ -2518,7 +2518,7 @@
           <a:p>
             <a:fld id="{397AAE18-5BE7-4440-BD7D-BAF2972CAD70}" type="datetimeFigureOut">
               <a:rPr lang="en-US" smtClean="0"/>
-              <a:t>5/4/26</a:t>
+              <a:t>5/7/26</a:t>
             </a:fld>
             <a:endParaRPr lang="en-US"/>
           </a:p>
@@ -2829,7 +2829,7 @@
           <a:p>
             <a:fld id="{397AAE18-5BE7-4440-BD7D-BAF2972CAD70}" type="datetimeFigureOut">
               <a:rPr lang="en-US" smtClean="0"/>
-              <a:t>5/4/26</a:t>
+              <a:t>5/7/26</a:t>
             </a:fld>
             <a:endParaRPr lang="en-US"/>
           </a:p>
@@ -3117,7 +3117,7 @@
           <a:p>
             <a:fld id="{397AAE18-5BE7-4440-BD7D-BAF2972CAD70}" type="datetimeFigureOut">
               <a:rPr lang="en-US" smtClean="0"/>
-              <a:t>5/4/26</a:t>
+              <a:t>5/7/26</a:t>
             </a:fld>
             <a:endParaRPr lang="en-US"/>
           </a:p>
@@ -3358,7 +3358,7 @@
           <a:p>
             <a:fld id="{397AAE18-5BE7-4440-BD7D-BAF2972CAD70}" type="datetimeFigureOut">
               <a:rPr lang="en-US" smtClean="0"/>
-              <a:t>5/4/26</a:t>
+              <a:t>5/7/26</a:t>
             </a:fld>
             <a:endParaRPr lang="en-US"/>
           </a:p>
@@ -5051,7 +5051,7 @@
         </p:nvSpPr>
         <p:spPr>
           <a:xfrm>
-            <a:off x="357674" y="5310126"/>
+            <a:off x="357674" y="5497415"/>
             <a:ext cx="5778501" cy="958471"/>
           </a:xfrm>
           <a:prstGeom prst="rect">
